--- a/docs/week-4/cen429-week-4-sunum.tr.pptx
+++ b/docs/week-4/cen429-week-4-sunum.tr.pptx
@@ -6566,40 +6566,30 @@
           </a:p>
         </p:txBody>
       </p:sp>
-      <p:sp>
-        <p:nvSpPr>
-          <p:cNvPr id="7" name="TextBox 6"/>
-          <p:cNvSpPr txBox="1"/>
-          <p:nvPr/>
-        </p:nvSpPr>
-        <p:spPr>
-          <a:xfrm>
-            <a:off x="640080" y="1325880"/>
-            <a:ext cx="10911535" cy="4319778"/>
-          </a:xfrm>
-          <a:prstGeom prst="rect">
-            <a:avLst/>
-          </a:prstGeom>
-          <a:noFill/>
-        </p:spPr>
-        <p:txBody>
-          <a:bodyPr wrap="square" lIns="45720" rIns="45720">
-            <a:spAutoFit/>
-          </a:bodyPr>
-          <a:lstStyle/>
-          <a:p>
-            <a:pPr algn="l"/>
-            <a:r>
-              <a:rPr sz="1500" b="0">
-                <a:solidFill>
-                  <a:srgbClr val="1F2D3A"/>
-                </a:solidFill>
-              </a:rPr>
-              <a:t>&lt;svg viewBox="0 0 900 300" style="width:92%;height:auto;display:block;margin:2px auto" font-family="sans-serif"&gt; &lt;text x="450" y="24" text-anchor="middle" font-size="16" fill="#555"&gt;Taşma tampondan aşağı, dönüş adresine doğru yazar →&lt;/text&gt; &lt;rect x="120" y="46" width="300" height="44" fill="#e8f6f7" stroke="#0a9396"/&gt;&lt;text x="270" y="74" text-anchor="middle" font-size="16"&gt;char buf[8] (yerel tampon)&lt;/text&gt; &lt;rect x="120" y="90" width="300" height="44" fill="#fff3cd" stroke="#b5651d" stroke-width="2"/&gt;&lt;text x="270" y="118" text-anchor="middle" font-size="15" font-weight="bold" fill="#8a4b12"&gt;KANARYA (rastgele nöbetçi)&lt;/text&gt; &lt;rect x="120" y="134" width="300" height="44" fill="#eef" stroke="#4054b2"/&gt;&lt;text x="270" y="162" text-anchor="middle" font-size="15"&gt;saved rbp&lt;/text&gt; &lt;rect x="120" y="178" width="300" height="44" fill="#fde8e8" stroke="#c0392b" stroke-width="2"/&gt;&lt;text x="270" y="206" text-anchor="middle" font-size="15" font-weight="bold" fill="#a01f1f"&gt;DÖNÜŞ ADRESİ&lt;/text&gt; &lt;line x1="470" y1="216" x2="470" y2="64" stroke="#c0392b" stroke-width="4" marker-end="url(#up4)"/&gt; &lt;text x="560" y="110" font-size="15" fill="#333"&gt;Dönüş adresine ulaşmak&lt;/text&gt; &lt;text x="560" y="134" font-size="15" fill="#333"&gt;için önce&lt;/text&gt; &lt;text x="560" y="158" font-size="15" fill="#8a4b12" font-weight="bold"&gt;KANARYA ezilmeli.&lt;/text&gt; &lt;text x="560" y="188" font-size="15" fill="#333"&gt;Dönüşte kanarya bozuksa&lt;/text&gt; &lt;text x="560" y="212" font-size="15" fill="#2e7d32" font-weight="bold"&gt;program durur.&lt;/text&gt; &lt;text x="450" y="268" text-anchor="middle" font-size="14" fill="#777"&gt;Durdurmaz: hedefli yazma · heap taşması · bilgi sızıntısı&lt;/text&gt; &lt;defs&gt;&lt;marker id="up4" markerWidth="12" markerHeight="12" refX="4" refY="9" orient="auto"&gt;&lt;path d="M4,0 L8,9 L0,9 Z" fill="#c0392b"/&gt;&lt;/marker&gt;&lt;/defs&gt; &lt;/svg&gt;</a:t>
-            </a:r>
-          </a:p>
-        </p:txBody>
-      </p:sp>
+      <p:pic>
+        <p:nvPicPr>
+          <p:cNvPr id="7" name="Picture 6" descr="h04-04-yigin-kanarya.png"/>
+          <p:cNvPicPr>
+            <a:picLocks noChangeAspect="1"/>
+          </p:cNvPicPr>
+          <p:nvPr/>
+        </p:nvPicPr>
+        <p:blipFill>
+          <a:blip r:embed="rId3"/>
+          <a:stretch>
+            <a:fillRect/>
+          </a:stretch>
+        </p:blipFill>
+        <p:spPr>
+          <a:xfrm>
+            <a:off x="1833529" y="1325880"/>
+            <a:ext cx="8524636" cy="4094620"/>
+          </a:xfrm>
+          <a:prstGeom prst="rect">
+            <a:avLst/>
+          </a:prstGeom>
+        </p:spPr>
+      </p:pic>
     </p:spTree>
   </p:cSld>
   <p:clrMapOvr>
